--- a/PowerBI/PowerBI Problem solving.pptx
+++ b/PowerBI/PowerBI Problem solving.pptx
@@ -634,7 +634,7 @@
           <a:p>
             <a:fld id="{027575BE-91DC-47C4-B513-84BA3C545695}" type="datetimeFigureOut">
               <a:rPr lang="en-US" smtClean="0"/>
-              <a:t>3/27/2026</a:t>
+              <a:t>4/17/2026</a:t>
             </a:fld>
             <a:endParaRPr lang="en-US"/>
           </a:p>
@@ -834,7 +834,7 @@
           <a:p>
             <a:fld id="{027575BE-91DC-47C4-B513-84BA3C545695}" type="datetimeFigureOut">
               <a:rPr lang="en-US" smtClean="0"/>
-              <a:t>3/27/2026</a:t>
+              <a:t>4/17/2026</a:t>
             </a:fld>
             <a:endParaRPr lang="en-US"/>
           </a:p>
@@ -1044,7 +1044,7 @@
           <a:p>
             <a:fld id="{027575BE-91DC-47C4-B513-84BA3C545695}" type="datetimeFigureOut">
               <a:rPr lang="en-US" smtClean="0"/>
-              <a:t>3/27/2026</a:t>
+              <a:t>4/17/2026</a:t>
             </a:fld>
             <a:endParaRPr lang="en-US"/>
           </a:p>
@@ -1244,7 +1244,7 @@
           <a:p>
             <a:fld id="{027575BE-91DC-47C4-B513-84BA3C545695}" type="datetimeFigureOut">
               <a:rPr lang="en-US" smtClean="0"/>
-              <a:t>3/27/2026</a:t>
+              <a:t>4/17/2026</a:t>
             </a:fld>
             <a:endParaRPr lang="en-US"/>
           </a:p>
@@ -1520,7 +1520,7 @@
           <a:p>
             <a:fld id="{027575BE-91DC-47C4-B513-84BA3C545695}" type="datetimeFigureOut">
               <a:rPr lang="en-US" smtClean="0"/>
-              <a:t>3/27/2026</a:t>
+              <a:t>4/17/2026</a:t>
             </a:fld>
             <a:endParaRPr lang="en-US"/>
           </a:p>
@@ -1788,7 +1788,7 @@
           <a:p>
             <a:fld id="{027575BE-91DC-47C4-B513-84BA3C545695}" type="datetimeFigureOut">
               <a:rPr lang="en-US" smtClean="0"/>
-              <a:t>3/27/2026</a:t>
+              <a:t>4/17/2026</a:t>
             </a:fld>
             <a:endParaRPr lang="en-US"/>
           </a:p>
@@ -2203,7 +2203,7 @@
           <a:p>
             <a:fld id="{027575BE-91DC-47C4-B513-84BA3C545695}" type="datetimeFigureOut">
               <a:rPr lang="en-US" smtClean="0"/>
-              <a:t>3/27/2026</a:t>
+              <a:t>4/17/2026</a:t>
             </a:fld>
             <a:endParaRPr lang="en-US"/>
           </a:p>
@@ -2345,7 +2345,7 @@
           <a:p>
             <a:fld id="{027575BE-91DC-47C4-B513-84BA3C545695}" type="datetimeFigureOut">
               <a:rPr lang="en-US" smtClean="0"/>
-              <a:t>3/27/2026</a:t>
+              <a:t>4/17/2026</a:t>
             </a:fld>
             <a:endParaRPr lang="en-US"/>
           </a:p>
@@ -2458,7 +2458,7 @@
           <a:p>
             <a:fld id="{027575BE-91DC-47C4-B513-84BA3C545695}" type="datetimeFigureOut">
               <a:rPr lang="en-US" smtClean="0"/>
-              <a:t>3/27/2026</a:t>
+              <a:t>4/17/2026</a:t>
             </a:fld>
             <a:endParaRPr lang="en-US"/>
           </a:p>
@@ -2771,7 +2771,7 @@
           <a:p>
             <a:fld id="{027575BE-91DC-47C4-B513-84BA3C545695}" type="datetimeFigureOut">
               <a:rPr lang="en-US" smtClean="0"/>
-              <a:t>3/27/2026</a:t>
+              <a:t>4/17/2026</a:t>
             </a:fld>
             <a:endParaRPr lang="en-US"/>
           </a:p>
@@ -3060,7 +3060,7 @@
           <a:p>
             <a:fld id="{027575BE-91DC-47C4-B513-84BA3C545695}" type="datetimeFigureOut">
               <a:rPr lang="en-US" smtClean="0"/>
-              <a:t>3/27/2026</a:t>
+              <a:t>4/17/2026</a:t>
             </a:fld>
             <a:endParaRPr lang="en-US"/>
           </a:p>
@@ -3303,7 +3303,7 @@
           <a:p>
             <a:fld id="{027575BE-91DC-47C4-B513-84BA3C545695}" type="datetimeFigureOut">
               <a:rPr lang="en-US" smtClean="0"/>
-              <a:t>3/27/2026</a:t>
+              <a:t>4/17/2026</a:t>
             </a:fld>
             <a:endParaRPr lang="en-US"/>
           </a:p>
